--- a/pillpulse_presentation.pptx
+++ b/pillpulse_presentation.pptx
@@ -307,7 +307,7 @@
           <a:p>
             <a:fld id="{5BCAD085-E8A6-8845-BD4E-CB4CCA059FC4}" type="datetimeFigureOut">
               <a:rPr lang="en-US" smtClean="0"/>
-              <a:t>3/9/2026</a:t>
+              <a:t>3/10/2026</a:t>
             </a:fld>
             <a:endParaRPr lang="en-US"/>
           </a:p>
@@ -475,7 +475,7 @@
           <a:p>
             <a:fld id="{5BCAD085-E8A6-8845-BD4E-CB4CCA059FC4}" type="datetimeFigureOut">
               <a:rPr lang="en-US" smtClean="0"/>
-              <a:t>3/9/2026</a:t>
+              <a:t>3/10/2026</a:t>
             </a:fld>
             <a:endParaRPr lang="en-US"/>
           </a:p>
@@ -653,7 +653,7 @@
           <a:p>
             <a:fld id="{5BCAD085-E8A6-8845-BD4E-CB4CCA059FC4}" type="datetimeFigureOut">
               <a:rPr lang="en-US" smtClean="0"/>
-              <a:t>3/9/2026</a:t>
+              <a:t>3/10/2026</a:t>
             </a:fld>
             <a:endParaRPr lang="en-US"/>
           </a:p>
@@ -821,7 +821,7 @@
           <a:p>
             <a:fld id="{5BCAD085-E8A6-8845-BD4E-CB4CCA059FC4}" type="datetimeFigureOut">
               <a:rPr lang="en-US" smtClean="0"/>
-              <a:t>3/9/2026</a:t>
+              <a:t>3/10/2026</a:t>
             </a:fld>
             <a:endParaRPr lang="en-US"/>
           </a:p>
@@ -1066,7 +1066,7 @@
           <a:p>
             <a:fld id="{5BCAD085-E8A6-8845-BD4E-CB4CCA059FC4}" type="datetimeFigureOut">
               <a:rPr lang="en-US" smtClean="0"/>
-              <a:t>3/9/2026</a:t>
+              <a:t>3/10/2026</a:t>
             </a:fld>
             <a:endParaRPr lang="en-US"/>
           </a:p>
@@ -1351,7 +1351,7 @@
           <a:p>
             <a:fld id="{5BCAD085-E8A6-8845-BD4E-CB4CCA059FC4}" type="datetimeFigureOut">
               <a:rPr lang="en-US" smtClean="0"/>
-              <a:t>3/9/2026</a:t>
+              <a:t>3/10/2026</a:t>
             </a:fld>
             <a:endParaRPr lang="en-US"/>
           </a:p>
@@ -1770,7 +1770,7 @@
           <a:p>
             <a:fld id="{5BCAD085-E8A6-8845-BD4E-CB4CCA059FC4}" type="datetimeFigureOut">
               <a:rPr lang="en-US" smtClean="0"/>
-              <a:t>3/9/2026</a:t>
+              <a:t>3/10/2026</a:t>
             </a:fld>
             <a:endParaRPr lang="en-US"/>
           </a:p>
@@ -1887,7 +1887,7 @@
           <a:p>
             <a:fld id="{5BCAD085-E8A6-8845-BD4E-CB4CCA059FC4}" type="datetimeFigureOut">
               <a:rPr lang="en-US" smtClean="0"/>
-              <a:t>3/9/2026</a:t>
+              <a:t>3/10/2026</a:t>
             </a:fld>
             <a:endParaRPr lang="en-US"/>
           </a:p>
@@ -1982,7 +1982,7 @@
           <a:p>
             <a:fld id="{5BCAD085-E8A6-8845-BD4E-CB4CCA059FC4}" type="datetimeFigureOut">
               <a:rPr lang="en-US" smtClean="0"/>
-              <a:t>3/9/2026</a:t>
+              <a:t>3/10/2026</a:t>
             </a:fld>
             <a:endParaRPr lang="en-US"/>
           </a:p>
@@ -2257,7 +2257,7 @@
           <a:p>
             <a:fld id="{5BCAD085-E8A6-8845-BD4E-CB4CCA059FC4}" type="datetimeFigureOut">
               <a:rPr lang="en-US" smtClean="0"/>
-              <a:t>3/9/2026</a:t>
+              <a:t>3/10/2026</a:t>
             </a:fld>
             <a:endParaRPr lang="en-US"/>
           </a:p>
@@ -2509,7 +2509,7 @@
           <a:p>
             <a:fld id="{5BCAD085-E8A6-8845-BD4E-CB4CCA059FC4}" type="datetimeFigureOut">
               <a:rPr lang="en-US" smtClean="0"/>
-              <a:t>3/9/2026</a:t>
+              <a:t>3/10/2026</a:t>
             </a:fld>
             <a:endParaRPr lang="en-US"/>
           </a:p>
@@ -2720,7 +2720,7 @@
           <a:p>
             <a:fld id="{5BCAD085-E8A6-8845-BD4E-CB4CCA059FC4}" type="datetimeFigureOut">
               <a:rPr lang="en-US" smtClean="0"/>
-              <a:t>3/9/2026</a:t>
+              <a:t>3/10/2026</a:t>
             </a:fld>
             <a:endParaRPr lang="en-US"/>
           </a:p>
@@ -3527,7 +3527,7 @@
             </a:endParaRPr>
           </a:p>
           <a:p>
-            <a:pPr marL="0" indent="0" defTabSz="914400">
+            <a:pPr marL="0" indent="0" algn="r" defTabSz="914400">
               <a:lnSpc>
                 <a:spcPct val="90000"/>
               </a:lnSpc>
@@ -3537,7 +3537,7 @@
               <a:buNone/>
             </a:pPr>
             <a:r>
-              <a:rPr lang="en-US" sz="3500" dirty="0">
+              <a:rPr lang="en-US" sz="1900" dirty="0">
                 <a:solidFill>
                   <a:schemeClr val="tx1">
                     <a:alpha val="60000"/>
@@ -3546,16 +3546,30 @@
               </a:rPr>
               <a:t>-Joshua A</a:t>
             </a:r>
-            <a:endParaRPr lang="en-US" sz="3500" kern="1200" dirty="0">
-              <a:solidFill>
-                <a:schemeClr val="tx1">
-                  <a:alpha val="60000"/>
-                </a:schemeClr>
-              </a:solidFill>
-              <a:latin typeface="+mn-lt"/>
-              <a:ea typeface="+mn-ea"/>
-              <a:cs typeface="+mn-cs"/>
-            </a:endParaRPr>
+          </a:p>
+          <a:p>
+            <a:pPr marL="0" indent="0" algn="r" defTabSz="914400">
+              <a:lnSpc>
+                <a:spcPct val="90000"/>
+              </a:lnSpc>
+              <a:spcBef>
+                <a:spcPts val="1000"/>
+              </a:spcBef>
+              <a:buNone/>
+            </a:pPr>
+            <a:r>
+              <a:rPr lang="en-US" sz="1900" kern="1200" dirty="0">
+                <a:solidFill>
+                  <a:schemeClr val="tx1">
+                    <a:alpha val="60000"/>
+                  </a:schemeClr>
+                </a:solidFill>
+                <a:latin typeface="+mn-lt"/>
+                <a:ea typeface="+mn-ea"/>
+                <a:cs typeface="+mn-cs"/>
+              </a:rPr>
+              <a:t>-John Alistair</a:t>
+            </a:r>
           </a:p>
         </p:txBody>
       </p:sp>
